--- a/BioPofile_Template.pptx
+++ b/BioPofile_Template.pptx
@@ -3516,14 +3516,14 @@
         <p:spPr>
           <a:xfrm>
             <a:off x="319092" y="5762738"/>
-            <a:ext cx="5709336" cy="953360"/>
+            <a:ext cx="4849850" cy="437299"/>
           </a:xfrm>
           <a:prstGeom prst="rect">
             <a:avLst/>
           </a:prstGeom>
         </p:spPr>
         <p:txBody>
-          <a:bodyPr lIns="0" tIns="0" rIns="0" bIns="0" rtlCol="0" anchor="t">
+          <a:bodyPr wrap="square" lIns="0" tIns="0" rIns="0" bIns="0" rtlCol="0" anchor="t">
             <a:spAutoFit/>
           </a:bodyPr>
           <a:lstStyle/>
@@ -3534,7 +3534,7 @@
               </a:lnSpc>
             </a:pPr>
             <a:r>
-              <a:rPr lang="en-US" sz="2591" b="1">
+              <a:rPr lang="en-US" sz="2400" b="1" dirty="0">
                 <a:solidFill>
                   <a:srgbClr val="FF52BA"/>
                 </a:solidFill>
@@ -3543,24 +3543,20 @@
                 <a:cs typeface="Arial MT Pro Bold"/>
                 <a:sym typeface="Arial MT Pro Bold"/>
               </a:rPr>
-              <a:t>DISPONIBILITÉ:   </a:t>
-            </a:r>
-          </a:p>
-          <a:p>
-            <a:pPr algn="l">
-              <a:lnSpc>
-                <a:spcPts val="3627"/>
-              </a:lnSpc>
-            </a:pPr>
-            <a:endParaRPr lang="en-US" sz="2591" b="1">
-              <a:solidFill>
-                <a:srgbClr val="FF52BA"/>
-              </a:solidFill>
-              <a:latin typeface="Arial MT Pro Bold"/>
-              <a:ea typeface="Arial MT Pro Bold"/>
-              <a:cs typeface="Arial MT Pro Bold"/>
-              <a:sym typeface="Arial MT Pro Bold"/>
-            </a:endParaRPr>
+              <a:t>DISPONIBILITÉ : </a:t>
+            </a:r>
+            <a:r>
+              <a:rPr lang="en-US" sz="2400" b="1" dirty="0">
+                <a:solidFill>
+                  <a:srgbClr val="FFFFFF"/>
+                </a:solidFill>
+                <a:latin typeface="Arial MT Pro Bold"/>
+                <a:ea typeface="Arial MT Pro Bold"/>
+                <a:cs typeface="Arial MT Pro Bold"/>
+                <a:sym typeface="Arial MT Pro Bold"/>
+              </a:rPr>
+              <a:t>{{DISPO}}</a:t>
+            </a:r>
           </a:p>
         </p:txBody>
       </p:sp>
@@ -3573,7 +3569,7 @@
         <p:spPr>
           <a:xfrm>
             <a:off x="319092" y="6797004"/>
-            <a:ext cx="5709336" cy="496160"/>
+            <a:ext cx="5709336" cy="430567"/>
           </a:xfrm>
           <a:prstGeom prst="rect">
             <a:avLst/>
@@ -3591,7 +3587,7 @@
               </a:lnSpc>
             </a:pPr>
             <a:r>
-              <a:rPr lang="en-US" sz="2591" b="1">
+              <a:rPr lang="en-US" sz="2400" b="1" dirty="0">
                 <a:solidFill>
                   <a:srgbClr val="FF52BA"/>
                 </a:solidFill>
@@ -3613,8 +3609,8 @@
         </p:nvSpPr>
         <p:spPr>
           <a:xfrm>
-            <a:off x="1372186" y="4240485"/>
-            <a:ext cx="2469118" cy="509050"/>
+            <a:off x="1085817" y="4250010"/>
+            <a:ext cx="3041855" cy="496160"/>
           </a:xfrm>
           <a:prstGeom prst="rect">
             <a:avLst/>
@@ -3628,15 +3624,1137 @@
           <a:p>
             <a:pPr algn="ctr">
               <a:lnSpc>
-                <a:spcPts val="4187"/>
-              </a:lnSpc>
-              <a:spcBef>
-                <a:spcPct val="0"/>
-              </a:spcBef>
-            </a:pPr>
-            <a:endParaRPr lang="en-US" sz="2991" b="1" dirty="0">
+                <a:spcPts val="3627"/>
+              </a:lnSpc>
+              <a:spcBef>
+                <a:spcPct val="0"/>
+              </a:spcBef>
+            </a:pPr>
+            <a:r>
+              <a:rPr lang="en-US" sz="2591" b="1" dirty="0">
+                <a:solidFill>
+                  <a:srgbClr val="FFFFFF"/>
+                </a:solidFill>
+                <a:latin typeface="Arial MT Pro Bold"/>
+                <a:ea typeface="Arial MT Pro Bold"/>
+                <a:cs typeface="Arial MT Pro Bold"/>
+                <a:sym typeface="Arial MT Pro Bold"/>
+              </a:rPr>
+              <a:t>{{NOM}}</a:t>
+            </a:r>
+          </a:p>
+        </p:txBody>
+      </p:sp>
+      <p:sp>
+        <p:nvSpPr>
+          <p:cNvPr id="16" name="TextBox 16"/>
+          <p:cNvSpPr txBox="1"/>
+          <p:nvPr/>
+        </p:nvSpPr>
+        <p:spPr>
+          <a:xfrm>
+            <a:off x="807859" y="7188389"/>
+            <a:ext cx="3751544" cy="2324960"/>
+          </a:xfrm>
+          <a:prstGeom prst="rect">
+            <a:avLst/>
+          </a:prstGeom>
+        </p:spPr>
+        <p:txBody>
+          <a:bodyPr lIns="0" tIns="0" rIns="0" bIns="0" rtlCol="0" anchor="t">
+            <a:spAutoFit/>
+          </a:bodyPr>
+          <a:lstStyle/>
+          <a:p>
+            <a:pPr marL="0" lvl="0" indent="0" algn="l">
+              <a:lnSpc>
+                <a:spcPts val="3627"/>
+              </a:lnSpc>
+              <a:spcBef>
+                <a:spcPct val="0"/>
+              </a:spcBef>
+            </a:pPr>
+            <a:r>
+              <a:rPr lang="en-US" sz="2400" b="1" u="none" strike="noStrike" dirty="0">
+                <a:solidFill>
+                  <a:srgbClr val="FFFFFF"/>
+                </a:solidFill>
+                <a:latin typeface="Arial MT Pro Bold"/>
+                <a:ea typeface="Arial MT Pro Bold"/>
+                <a:cs typeface="Arial MT Pro Bold"/>
+                <a:sym typeface="Arial MT Pro Bold"/>
+              </a:rPr>
+              <a:t>{{LANGUES}}</a:t>
+            </a:r>
+          </a:p>
+          <a:p>
+            <a:pPr marL="0" lvl="0" indent="0" algn="l">
+              <a:lnSpc>
+                <a:spcPts val="3627"/>
+              </a:lnSpc>
+              <a:spcBef>
+                <a:spcPct val="0"/>
+              </a:spcBef>
+            </a:pPr>
+            <a:endParaRPr lang="en-US" sz="2400" b="1" u="none" strike="noStrike" dirty="0">
               <a:solidFill>
                 <a:srgbClr val="FFFFFF"/>
+              </a:solidFill>
+              <a:latin typeface="Arial MT Pro Bold"/>
+              <a:ea typeface="Arial MT Pro Bold"/>
+              <a:cs typeface="Arial MT Pro Bold"/>
+              <a:sym typeface="Arial MT Pro Bold"/>
+            </a:endParaRPr>
+          </a:p>
+          <a:p>
+            <a:pPr marL="0" lvl="0" indent="0" algn="l">
+              <a:lnSpc>
+                <a:spcPts val="3627"/>
+              </a:lnSpc>
+              <a:spcBef>
+                <a:spcPct val="0"/>
+              </a:spcBef>
+            </a:pPr>
+            <a:endParaRPr lang="en-US" sz="2400" b="1" u="none" strike="noStrike" dirty="0">
+              <a:solidFill>
+                <a:srgbClr val="FFFFFF"/>
+              </a:solidFill>
+              <a:latin typeface="Arial MT Pro Bold"/>
+              <a:ea typeface="Arial MT Pro Bold"/>
+              <a:cs typeface="Arial MT Pro Bold"/>
+              <a:sym typeface="Arial MT Pro Bold"/>
+            </a:endParaRPr>
+          </a:p>
+          <a:p>
+            <a:pPr marL="0" lvl="0" indent="0" algn="l">
+              <a:lnSpc>
+                <a:spcPts val="3627"/>
+              </a:lnSpc>
+              <a:spcBef>
+                <a:spcPct val="0"/>
+              </a:spcBef>
+            </a:pPr>
+            <a:endParaRPr lang="en-US" sz="2400" b="1" u="none" strike="noStrike" dirty="0">
+              <a:solidFill>
+                <a:srgbClr val="FFFFFF"/>
+              </a:solidFill>
+              <a:latin typeface="Arial MT Pro Bold"/>
+              <a:ea typeface="Arial MT Pro Bold"/>
+              <a:cs typeface="Arial MT Pro Bold"/>
+              <a:sym typeface="Arial MT Pro Bold"/>
+            </a:endParaRPr>
+          </a:p>
+          <a:p>
+            <a:pPr marL="0" lvl="0" indent="0" algn="l">
+              <a:lnSpc>
+                <a:spcPts val="3627"/>
+              </a:lnSpc>
+              <a:spcBef>
+                <a:spcPct val="0"/>
+              </a:spcBef>
+            </a:pPr>
+            <a:endParaRPr lang="en-US" sz="2400" b="1" u="none" strike="noStrike" dirty="0">
+              <a:solidFill>
+                <a:srgbClr val="FFFFFF"/>
+              </a:solidFill>
+              <a:latin typeface="Arial MT Pro Bold"/>
+              <a:ea typeface="Arial MT Pro Bold"/>
+              <a:cs typeface="Arial MT Pro Bold"/>
+              <a:sym typeface="Arial MT Pro Bold"/>
+            </a:endParaRPr>
+          </a:p>
+        </p:txBody>
+      </p:sp>
+      <p:sp>
+        <p:nvSpPr>
+          <p:cNvPr id="17" name="TextBox 17"/>
+          <p:cNvSpPr txBox="1"/>
+          <p:nvPr/>
+        </p:nvSpPr>
+        <p:spPr>
+          <a:xfrm>
+            <a:off x="6185963" y="933450"/>
+            <a:ext cx="11583532" cy="4225515"/>
+          </a:xfrm>
+          <a:prstGeom prst="rect">
+            <a:avLst/>
+          </a:prstGeom>
+        </p:spPr>
+        <p:txBody>
+          <a:bodyPr lIns="0" tIns="0" rIns="0" bIns="0" rtlCol="0" anchor="t">
+            <a:spAutoFit/>
+          </a:bodyPr>
+          <a:lstStyle/>
+          <a:p>
+            <a:pPr algn="ctr">
+              <a:lnSpc>
+                <a:spcPts val="3347"/>
+              </a:lnSpc>
+              <a:spcBef>
+                <a:spcPct val="0"/>
+              </a:spcBef>
+            </a:pPr>
+            <a:r>
+              <a:rPr lang="en-US" sz="2391" b="1" dirty="0">
+                <a:solidFill>
+                  <a:srgbClr val="000000"/>
+                </a:solidFill>
+                <a:latin typeface="Arial MT Pro Bold"/>
+                <a:ea typeface="Arial MT Pro Bold"/>
+                <a:cs typeface="Arial MT Pro Bold"/>
+                <a:sym typeface="Arial MT Pro Bold"/>
+              </a:rPr>
+              <a:t>{{PROJETS}}</a:t>
+            </a:r>
+          </a:p>
+          <a:p>
+            <a:pPr algn="ctr">
+              <a:lnSpc>
+                <a:spcPts val="3347"/>
+              </a:lnSpc>
+              <a:spcBef>
+                <a:spcPct val="0"/>
+              </a:spcBef>
+            </a:pPr>
+            <a:endParaRPr lang="en-US" sz="2391" b="1" dirty="0">
+              <a:solidFill>
+                <a:srgbClr val="000000"/>
+              </a:solidFill>
+              <a:latin typeface="Arial MT Pro Bold"/>
+              <a:ea typeface="Arial MT Pro Bold"/>
+              <a:cs typeface="Arial MT Pro Bold"/>
+              <a:sym typeface="Arial MT Pro Bold"/>
+            </a:endParaRPr>
+          </a:p>
+          <a:p>
+            <a:pPr algn="ctr">
+              <a:lnSpc>
+                <a:spcPts val="3347"/>
+              </a:lnSpc>
+              <a:spcBef>
+                <a:spcPct val="0"/>
+              </a:spcBef>
+            </a:pPr>
+            <a:endParaRPr lang="en-US" sz="2391" b="1" dirty="0">
+              <a:solidFill>
+                <a:srgbClr val="000000"/>
+              </a:solidFill>
+              <a:latin typeface="Arial MT Pro Bold"/>
+              <a:ea typeface="Arial MT Pro Bold"/>
+              <a:cs typeface="Arial MT Pro Bold"/>
+              <a:sym typeface="Arial MT Pro Bold"/>
+            </a:endParaRPr>
+          </a:p>
+          <a:p>
+            <a:pPr algn="ctr">
+              <a:lnSpc>
+                <a:spcPts val="3347"/>
+              </a:lnSpc>
+              <a:spcBef>
+                <a:spcPct val="0"/>
+              </a:spcBef>
+            </a:pPr>
+            <a:endParaRPr lang="en-US" sz="2391" b="1" dirty="0">
+              <a:solidFill>
+                <a:srgbClr val="000000"/>
+              </a:solidFill>
+              <a:latin typeface="Arial MT Pro Bold"/>
+              <a:ea typeface="Arial MT Pro Bold"/>
+              <a:cs typeface="Arial MT Pro Bold"/>
+              <a:sym typeface="Arial MT Pro Bold"/>
+            </a:endParaRPr>
+          </a:p>
+          <a:p>
+            <a:pPr algn="ctr">
+              <a:lnSpc>
+                <a:spcPts val="3347"/>
+              </a:lnSpc>
+              <a:spcBef>
+                <a:spcPct val="0"/>
+              </a:spcBef>
+            </a:pPr>
+            <a:endParaRPr lang="en-US" sz="2391" b="1" dirty="0">
+              <a:solidFill>
+                <a:srgbClr val="000000"/>
+              </a:solidFill>
+              <a:latin typeface="Arial MT Pro Bold"/>
+              <a:ea typeface="Arial MT Pro Bold"/>
+              <a:cs typeface="Arial MT Pro Bold"/>
+              <a:sym typeface="Arial MT Pro Bold"/>
+            </a:endParaRPr>
+          </a:p>
+          <a:p>
+            <a:pPr algn="ctr">
+              <a:lnSpc>
+                <a:spcPts val="3347"/>
+              </a:lnSpc>
+              <a:spcBef>
+                <a:spcPct val="0"/>
+              </a:spcBef>
+            </a:pPr>
+            <a:endParaRPr lang="en-US" sz="2391" b="1" dirty="0">
+              <a:solidFill>
+                <a:srgbClr val="000000"/>
+              </a:solidFill>
+              <a:latin typeface="Arial MT Pro Bold"/>
+              <a:ea typeface="Arial MT Pro Bold"/>
+              <a:cs typeface="Arial MT Pro Bold"/>
+              <a:sym typeface="Arial MT Pro Bold"/>
+            </a:endParaRPr>
+          </a:p>
+          <a:p>
+            <a:pPr algn="ctr">
+              <a:lnSpc>
+                <a:spcPts val="3347"/>
+              </a:lnSpc>
+              <a:spcBef>
+                <a:spcPct val="0"/>
+              </a:spcBef>
+            </a:pPr>
+            <a:endParaRPr lang="en-US" sz="2391" b="1" dirty="0">
+              <a:solidFill>
+                <a:srgbClr val="000000"/>
+              </a:solidFill>
+              <a:latin typeface="Arial MT Pro Bold"/>
+              <a:ea typeface="Arial MT Pro Bold"/>
+              <a:cs typeface="Arial MT Pro Bold"/>
+              <a:sym typeface="Arial MT Pro Bold"/>
+            </a:endParaRPr>
+          </a:p>
+          <a:p>
+            <a:pPr algn="ctr">
+              <a:lnSpc>
+                <a:spcPts val="3347"/>
+              </a:lnSpc>
+              <a:spcBef>
+                <a:spcPct val="0"/>
+              </a:spcBef>
+            </a:pPr>
+            <a:endParaRPr lang="en-US" sz="2391" b="1" dirty="0">
+              <a:solidFill>
+                <a:srgbClr val="000000"/>
+              </a:solidFill>
+              <a:latin typeface="Arial MT Pro Bold"/>
+              <a:ea typeface="Arial MT Pro Bold"/>
+              <a:cs typeface="Arial MT Pro Bold"/>
+              <a:sym typeface="Arial MT Pro Bold"/>
+            </a:endParaRPr>
+          </a:p>
+          <a:p>
+            <a:pPr algn="ctr">
+              <a:lnSpc>
+                <a:spcPts val="3347"/>
+              </a:lnSpc>
+              <a:spcBef>
+                <a:spcPct val="0"/>
+              </a:spcBef>
+            </a:pPr>
+            <a:endParaRPr lang="en-US" sz="2391" b="1" dirty="0">
+              <a:solidFill>
+                <a:srgbClr val="000000"/>
+              </a:solidFill>
+              <a:latin typeface="Arial MT Pro Bold"/>
+              <a:ea typeface="Arial MT Pro Bold"/>
+              <a:cs typeface="Arial MT Pro Bold"/>
+              <a:sym typeface="Arial MT Pro Bold"/>
+            </a:endParaRPr>
+          </a:p>
+          <a:p>
+            <a:pPr algn="ctr">
+              <a:lnSpc>
+                <a:spcPts val="3347"/>
+              </a:lnSpc>
+              <a:spcBef>
+                <a:spcPct val="0"/>
+              </a:spcBef>
+            </a:pPr>
+            <a:endParaRPr lang="en-US" sz="2391" b="1" dirty="0">
+              <a:solidFill>
+                <a:srgbClr val="000000"/>
+              </a:solidFill>
+              <a:latin typeface="Arial MT Pro Bold"/>
+              <a:ea typeface="Arial MT Pro Bold"/>
+              <a:cs typeface="Arial MT Pro Bold"/>
+              <a:sym typeface="Arial MT Pro Bold"/>
+            </a:endParaRPr>
+          </a:p>
+        </p:txBody>
+      </p:sp>
+      <p:sp>
+        <p:nvSpPr>
+          <p:cNvPr id="18" name="TextBox 18"/>
+          <p:cNvSpPr txBox="1"/>
+          <p:nvPr/>
+        </p:nvSpPr>
+        <p:spPr>
+          <a:xfrm>
+            <a:off x="6028428" y="5805283"/>
+            <a:ext cx="3115572" cy="4225515"/>
+          </a:xfrm>
+          <a:prstGeom prst="rect">
+            <a:avLst/>
+          </a:prstGeom>
+        </p:spPr>
+        <p:txBody>
+          <a:bodyPr lIns="0" tIns="0" rIns="0" bIns="0" rtlCol="0" anchor="t">
+            <a:spAutoFit/>
+          </a:bodyPr>
+          <a:lstStyle/>
+          <a:p>
+            <a:pPr marL="0" lvl="0" indent="0" algn="ctr">
+              <a:lnSpc>
+                <a:spcPts val="3347"/>
+              </a:lnSpc>
+              <a:spcBef>
+                <a:spcPct val="0"/>
+              </a:spcBef>
+            </a:pPr>
+            <a:r>
+              <a:rPr lang="en-US" sz="2391" b="1" u="none" strike="noStrike" dirty="0">
+                <a:solidFill>
+                  <a:srgbClr val="000000"/>
+                </a:solidFill>
+                <a:latin typeface="Arial MT Pro Bold"/>
+                <a:ea typeface="Arial MT Pro Bold"/>
+                <a:cs typeface="Arial MT Pro Bold"/>
+                <a:sym typeface="Arial MT Pro Bold"/>
+              </a:rPr>
+              <a:t>{{HARD}}</a:t>
+            </a:r>
+          </a:p>
+          <a:p>
+            <a:pPr marL="0" lvl="0" indent="0" algn="ctr">
+              <a:lnSpc>
+                <a:spcPts val="3347"/>
+              </a:lnSpc>
+              <a:spcBef>
+                <a:spcPct val="0"/>
+              </a:spcBef>
+            </a:pPr>
+            <a:endParaRPr lang="en-US" sz="2391" b="1" u="none" strike="noStrike" dirty="0">
+              <a:solidFill>
+                <a:srgbClr val="000000"/>
+              </a:solidFill>
+              <a:latin typeface="Arial MT Pro Bold"/>
+              <a:ea typeface="Arial MT Pro Bold"/>
+              <a:cs typeface="Arial MT Pro Bold"/>
+              <a:sym typeface="Arial MT Pro Bold"/>
+            </a:endParaRPr>
+          </a:p>
+          <a:p>
+            <a:pPr marL="0" lvl="0" indent="0" algn="ctr">
+              <a:lnSpc>
+                <a:spcPts val="3347"/>
+              </a:lnSpc>
+              <a:spcBef>
+                <a:spcPct val="0"/>
+              </a:spcBef>
+            </a:pPr>
+            <a:endParaRPr lang="en-US" sz="2391" b="1" u="none" strike="noStrike" dirty="0">
+              <a:solidFill>
+                <a:srgbClr val="000000"/>
+              </a:solidFill>
+              <a:latin typeface="Arial MT Pro Bold"/>
+              <a:ea typeface="Arial MT Pro Bold"/>
+              <a:cs typeface="Arial MT Pro Bold"/>
+              <a:sym typeface="Arial MT Pro Bold"/>
+            </a:endParaRPr>
+          </a:p>
+          <a:p>
+            <a:pPr marL="0" lvl="0" indent="0" algn="ctr">
+              <a:lnSpc>
+                <a:spcPts val="3347"/>
+              </a:lnSpc>
+              <a:spcBef>
+                <a:spcPct val="0"/>
+              </a:spcBef>
+            </a:pPr>
+            <a:endParaRPr lang="en-US" sz="2391" b="1" u="none" strike="noStrike" dirty="0">
+              <a:solidFill>
+                <a:srgbClr val="000000"/>
+              </a:solidFill>
+              <a:latin typeface="Arial MT Pro Bold"/>
+              <a:ea typeface="Arial MT Pro Bold"/>
+              <a:cs typeface="Arial MT Pro Bold"/>
+              <a:sym typeface="Arial MT Pro Bold"/>
+            </a:endParaRPr>
+          </a:p>
+          <a:p>
+            <a:pPr marL="0" lvl="0" indent="0" algn="ctr">
+              <a:lnSpc>
+                <a:spcPts val="3347"/>
+              </a:lnSpc>
+              <a:spcBef>
+                <a:spcPct val="0"/>
+              </a:spcBef>
+            </a:pPr>
+            <a:endParaRPr lang="en-US" sz="2391" b="1" u="none" strike="noStrike" dirty="0">
+              <a:solidFill>
+                <a:srgbClr val="000000"/>
+              </a:solidFill>
+              <a:latin typeface="Arial MT Pro Bold"/>
+              <a:ea typeface="Arial MT Pro Bold"/>
+              <a:cs typeface="Arial MT Pro Bold"/>
+              <a:sym typeface="Arial MT Pro Bold"/>
+            </a:endParaRPr>
+          </a:p>
+          <a:p>
+            <a:pPr marL="0" lvl="0" indent="0" algn="ctr">
+              <a:lnSpc>
+                <a:spcPts val="3347"/>
+              </a:lnSpc>
+              <a:spcBef>
+                <a:spcPct val="0"/>
+              </a:spcBef>
+            </a:pPr>
+            <a:endParaRPr lang="en-US" sz="2391" b="1" u="none" strike="noStrike" dirty="0">
+              <a:solidFill>
+                <a:srgbClr val="000000"/>
+              </a:solidFill>
+              <a:latin typeface="Arial MT Pro Bold"/>
+              <a:ea typeface="Arial MT Pro Bold"/>
+              <a:cs typeface="Arial MT Pro Bold"/>
+              <a:sym typeface="Arial MT Pro Bold"/>
+            </a:endParaRPr>
+          </a:p>
+          <a:p>
+            <a:pPr marL="0" lvl="0" indent="0" algn="ctr">
+              <a:lnSpc>
+                <a:spcPts val="3347"/>
+              </a:lnSpc>
+              <a:spcBef>
+                <a:spcPct val="0"/>
+              </a:spcBef>
+            </a:pPr>
+            <a:endParaRPr lang="en-US" sz="2391" b="1" u="none" strike="noStrike" dirty="0">
+              <a:solidFill>
+                <a:srgbClr val="000000"/>
+              </a:solidFill>
+              <a:latin typeface="Arial MT Pro Bold"/>
+              <a:ea typeface="Arial MT Pro Bold"/>
+              <a:cs typeface="Arial MT Pro Bold"/>
+              <a:sym typeface="Arial MT Pro Bold"/>
+            </a:endParaRPr>
+          </a:p>
+          <a:p>
+            <a:pPr marL="0" lvl="0" indent="0" algn="ctr">
+              <a:lnSpc>
+                <a:spcPts val="3347"/>
+              </a:lnSpc>
+              <a:spcBef>
+                <a:spcPct val="0"/>
+              </a:spcBef>
+            </a:pPr>
+            <a:endParaRPr lang="en-US" sz="2391" b="1" u="none" strike="noStrike" dirty="0">
+              <a:solidFill>
+                <a:srgbClr val="000000"/>
+              </a:solidFill>
+              <a:latin typeface="Arial MT Pro Bold"/>
+              <a:ea typeface="Arial MT Pro Bold"/>
+              <a:cs typeface="Arial MT Pro Bold"/>
+              <a:sym typeface="Arial MT Pro Bold"/>
+            </a:endParaRPr>
+          </a:p>
+          <a:p>
+            <a:pPr marL="0" lvl="0" indent="0" algn="ctr">
+              <a:lnSpc>
+                <a:spcPts val="3347"/>
+              </a:lnSpc>
+              <a:spcBef>
+                <a:spcPct val="0"/>
+              </a:spcBef>
+            </a:pPr>
+            <a:endParaRPr lang="en-US" sz="2391" b="1" u="none" strike="noStrike" dirty="0">
+              <a:solidFill>
+                <a:srgbClr val="000000"/>
+              </a:solidFill>
+              <a:latin typeface="Arial MT Pro Bold"/>
+              <a:ea typeface="Arial MT Pro Bold"/>
+              <a:cs typeface="Arial MT Pro Bold"/>
+              <a:sym typeface="Arial MT Pro Bold"/>
+            </a:endParaRPr>
+          </a:p>
+          <a:p>
+            <a:pPr marL="0" lvl="0" indent="0" algn="ctr">
+              <a:lnSpc>
+                <a:spcPts val="3347"/>
+              </a:lnSpc>
+              <a:spcBef>
+                <a:spcPct val="0"/>
+              </a:spcBef>
+            </a:pPr>
+            <a:endParaRPr lang="en-US" sz="2391" b="1" u="none" strike="noStrike" dirty="0">
+              <a:solidFill>
+                <a:srgbClr val="000000"/>
+              </a:solidFill>
+              <a:latin typeface="Arial MT Pro Bold"/>
+              <a:ea typeface="Arial MT Pro Bold"/>
+              <a:cs typeface="Arial MT Pro Bold"/>
+              <a:sym typeface="Arial MT Pro Bold"/>
+            </a:endParaRPr>
+          </a:p>
+        </p:txBody>
+      </p:sp>
+      <p:sp>
+        <p:nvSpPr>
+          <p:cNvPr id="19" name="TextBox 19"/>
+          <p:cNvSpPr txBox="1"/>
+          <p:nvPr/>
+        </p:nvSpPr>
+        <p:spPr>
+          <a:xfrm>
+            <a:off x="9530636" y="5805283"/>
+            <a:ext cx="3265717" cy="4225515"/>
+          </a:xfrm>
+          <a:prstGeom prst="rect">
+            <a:avLst/>
+          </a:prstGeom>
+        </p:spPr>
+        <p:txBody>
+          <a:bodyPr lIns="0" tIns="0" rIns="0" bIns="0" rtlCol="0" anchor="t">
+            <a:spAutoFit/>
+          </a:bodyPr>
+          <a:lstStyle/>
+          <a:p>
+            <a:pPr marL="0" lvl="0" indent="0" algn="ctr">
+              <a:lnSpc>
+                <a:spcPts val="3347"/>
+              </a:lnSpc>
+              <a:spcBef>
+                <a:spcPct val="0"/>
+              </a:spcBef>
+            </a:pPr>
+            <a:r>
+              <a:rPr lang="en-US" sz="2391" b="1" u="none" strike="noStrike" dirty="0">
+                <a:solidFill>
+                  <a:srgbClr val="000000"/>
+                </a:solidFill>
+                <a:latin typeface="Arial MT Pro Bold"/>
+                <a:ea typeface="Arial MT Pro Bold"/>
+                <a:cs typeface="Arial MT Pro Bold"/>
+                <a:sym typeface="Arial MT Pro Bold"/>
+              </a:rPr>
+              <a:t>{{SOFT}}</a:t>
+            </a:r>
+          </a:p>
+          <a:p>
+            <a:pPr marL="0" lvl="0" indent="0" algn="ctr">
+              <a:lnSpc>
+                <a:spcPts val="3347"/>
+              </a:lnSpc>
+              <a:spcBef>
+                <a:spcPct val="0"/>
+              </a:spcBef>
+            </a:pPr>
+            <a:endParaRPr lang="en-US" sz="2391" b="1" u="none" strike="noStrike" dirty="0">
+              <a:solidFill>
+                <a:srgbClr val="000000"/>
+              </a:solidFill>
+              <a:latin typeface="Arial MT Pro Bold"/>
+              <a:ea typeface="Arial MT Pro Bold"/>
+              <a:cs typeface="Arial MT Pro Bold"/>
+              <a:sym typeface="Arial MT Pro Bold"/>
+            </a:endParaRPr>
+          </a:p>
+          <a:p>
+            <a:pPr marL="0" lvl="0" indent="0" algn="ctr">
+              <a:lnSpc>
+                <a:spcPts val="3347"/>
+              </a:lnSpc>
+              <a:spcBef>
+                <a:spcPct val="0"/>
+              </a:spcBef>
+            </a:pPr>
+            <a:endParaRPr lang="en-US" sz="2391" b="1" u="none" strike="noStrike" dirty="0">
+              <a:solidFill>
+                <a:srgbClr val="000000"/>
+              </a:solidFill>
+              <a:latin typeface="Arial MT Pro Bold"/>
+              <a:ea typeface="Arial MT Pro Bold"/>
+              <a:cs typeface="Arial MT Pro Bold"/>
+              <a:sym typeface="Arial MT Pro Bold"/>
+            </a:endParaRPr>
+          </a:p>
+          <a:p>
+            <a:pPr marL="0" lvl="0" indent="0" algn="ctr">
+              <a:lnSpc>
+                <a:spcPts val="3347"/>
+              </a:lnSpc>
+              <a:spcBef>
+                <a:spcPct val="0"/>
+              </a:spcBef>
+            </a:pPr>
+            <a:endParaRPr lang="en-US" sz="2391" b="1" u="none" strike="noStrike" dirty="0">
+              <a:solidFill>
+                <a:srgbClr val="000000"/>
+              </a:solidFill>
+              <a:latin typeface="Arial MT Pro Bold"/>
+              <a:ea typeface="Arial MT Pro Bold"/>
+              <a:cs typeface="Arial MT Pro Bold"/>
+              <a:sym typeface="Arial MT Pro Bold"/>
+            </a:endParaRPr>
+          </a:p>
+          <a:p>
+            <a:pPr marL="0" lvl="0" indent="0" algn="ctr">
+              <a:lnSpc>
+                <a:spcPts val="3347"/>
+              </a:lnSpc>
+              <a:spcBef>
+                <a:spcPct val="0"/>
+              </a:spcBef>
+            </a:pPr>
+            <a:endParaRPr lang="en-US" sz="2391" b="1" u="none" strike="noStrike" dirty="0">
+              <a:solidFill>
+                <a:srgbClr val="000000"/>
+              </a:solidFill>
+              <a:latin typeface="Arial MT Pro Bold"/>
+              <a:ea typeface="Arial MT Pro Bold"/>
+              <a:cs typeface="Arial MT Pro Bold"/>
+              <a:sym typeface="Arial MT Pro Bold"/>
+            </a:endParaRPr>
+          </a:p>
+          <a:p>
+            <a:pPr marL="0" lvl="0" indent="0" algn="ctr">
+              <a:lnSpc>
+                <a:spcPts val="3347"/>
+              </a:lnSpc>
+              <a:spcBef>
+                <a:spcPct val="0"/>
+              </a:spcBef>
+            </a:pPr>
+            <a:endParaRPr lang="en-US" sz="2391" b="1" u="none" strike="noStrike" dirty="0">
+              <a:solidFill>
+                <a:srgbClr val="000000"/>
+              </a:solidFill>
+              <a:latin typeface="Arial MT Pro Bold"/>
+              <a:ea typeface="Arial MT Pro Bold"/>
+              <a:cs typeface="Arial MT Pro Bold"/>
+              <a:sym typeface="Arial MT Pro Bold"/>
+            </a:endParaRPr>
+          </a:p>
+          <a:p>
+            <a:pPr marL="0" lvl="0" indent="0" algn="ctr">
+              <a:lnSpc>
+                <a:spcPts val="3347"/>
+              </a:lnSpc>
+              <a:spcBef>
+                <a:spcPct val="0"/>
+              </a:spcBef>
+            </a:pPr>
+            <a:endParaRPr lang="en-US" sz="2391" b="1" u="none" strike="noStrike" dirty="0">
+              <a:solidFill>
+                <a:srgbClr val="000000"/>
+              </a:solidFill>
+              <a:latin typeface="Arial MT Pro Bold"/>
+              <a:ea typeface="Arial MT Pro Bold"/>
+              <a:cs typeface="Arial MT Pro Bold"/>
+              <a:sym typeface="Arial MT Pro Bold"/>
+            </a:endParaRPr>
+          </a:p>
+          <a:p>
+            <a:pPr marL="0" lvl="0" indent="0" algn="ctr">
+              <a:lnSpc>
+                <a:spcPts val="3347"/>
+              </a:lnSpc>
+              <a:spcBef>
+                <a:spcPct val="0"/>
+              </a:spcBef>
+            </a:pPr>
+            <a:endParaRPr lang="en-US" sz="2391" b="1" u="none" strike="noStrike" dirty="0">
+              <a:solidFill>
+                <a:srgbClr val="000000"/>
+              </a:solidFill>
+              <a:latin typeface="Arial MT Pro Bold"/>
+              <a:ea typeface="Arial MT Pro Bold"/>
+              <a:cs typeface="Arial MT Pro Bold"/>
+              <a:sym typeface="Arial MT Pro Bold"/>
+            </a:endParaRPr>
+          </a:p>
+          <a:p>
+            <a:pPr marL="0" lvl="0" indent="0" algn="ctr">
+              <a:lnSpc>
+                <a:spcPts val="3347"/>
+              </a:lnSpc>
+              <a:spcBef>
+                <a:spcPct val="0"/>
+              </a:spcBef>
+            </a:pPr>
+            <a:endParaRPr lang="en-US" sz="2391" b="1" u="none" strike="noStrike" dirty="0">
+              <a:solidFill>
+                <a:srgbClr val="000000"/>
+              </a:solidFill>
+              <a:latin typeface="Arial MT Pro Bold"/>
+              <a:ea typeface="Arial MT Pro Bold"/>
+              <a:cs typeface="Arial MT Pro Bold"/>
+              <a:sym typeface="Arial MT Pro Bold"/>
+            </a:endParaRPr>
+          </a:p>
+          <a:p>
+            <a:pPr marL="0" lvl="0" indent="0" algn="ctr">
+              <a:lnSpc>
+                <a:spcPts val="3347"/>
+              </a:lnSpc>
+              <a:spcBef>
+                <a:spcPct val="0"/>
+              </a:spcBef>
+            </a:pPr>
+            <a:endParaRPr lang="en-US" sz="2391" b="1" u="none" strike="noStrike" dirty="0">
+              <a:solidFill>
+                <a:srgbClr val="000000"/>
+              </a:solidFill>
+              <a:latin typeface="Arial MT Pro Bold"/>
+              <a:ea typeface="Arial MT Pro Bold"/>
+              <a:cs typeface="Arial MT Pro Bold"/>
+              <a:sym typeface="Arial MT Pro Bold"/>
+            </a:endParaRPr>
+          </a:p>
+        </p:txBody>
+      </p:sp>
+      <p:sp>
+        <p:nvSpPr>
+          <p:cNvPr id="20" name="TextBox 20"/>
+          <p:cNvSpPr txBox="1"/>
+          <p:nvPr/>
+        </p:nvSpPr>
+        <p:spPr>
+          <a:xfrm>
+            <a:off x="14223688" y="5805283"/>
+            <a:ext cx="3035612" cy="4225515"/>
+          </a:xfrm>
+          <a:prstGeom prst="rect">
+            <a:avLst/>
+          </a:prstGeom>
+        </p:spPr>
+        <p:txBody>
+          <a:bodyPr lIns="0" tIns="0" rIns="0" bIns="0" rtlCol="0" anchor="t">
+            <a:spAutoFit/>
+          </a:bodyPr>
+          <a:lstStyle/>
+          <a:p>
+            <a:pPr marL="0" lvl="0" indent="0" algn="ctr">
+              <a:lnSpc>
+                <a:spcPts val="3347"/>
+              </a:lnSpc>
+              <a:spcBef>
+                <a:spcPct val="0"/>
+              </a:spcBef>
+            </a:pPr>
+            <a:r>
+              <a:rPr lang="en-US" sz="2391" b="1" u="none" strike="noStrike" dirty="0">
+                <a:solidFill>
+                  <a:srgbClr val="000000"/>
+                </a:solidFill>
+                <a:latin typeface="Arial MT Pro Bold"/>
+                <a:ea typeface="Arial MT Pro Bold"/>
+                <a:cs typeface="Arial MT Pro Bold"/>
+                <a:sym typeface="Arial MT Pro Bold"/>
+              </a:rPr>
+              <a:t>{{OUTILS}}</a:t>
+            </a:r>
+          </a:p>
+          <a:p>
+            <a:pPr marL="0" lvl="0" indent="0" algn="ctr">
+              <a:lnSpc>
+                <a:spcPts val="3347"/>
+              </a:lnSpc>
+              <a:spcBef>
+                <a:spcPct val="0"/>
+              </a:spcBef>
+            </a:pPr>
+            <a:endParaRPr lang="en-US" sz="2391" b="1" u="none" strike="noStrike" dirty="0">
+              <a:solidFill>
+                <a:srgbClr val="000000"/>
+              </a:solidFill>
+              <a:latin typeface="Arial MT Pro Bold"/>
+              <a:ea typeface="Arial MT Pro Bold"/>
+              <a:cs typeface="Arial MT Pro Bold"/>
+              <a:sym typeface="Arial MT Pro Bold"/>
+            </a:endParaRPr>
+          </a:p>
+          <a:p>
+            <a:pPr marL="0" lvl="0" indent="0" algn="ctr">
+              <a:lnSpc>
+                <a:spcPts val="3347"/>
+              </a:lnSpc>
+              <a:spcBef>
+                <a:spcPct val="0"/>
+              </a:spcBef>
+            </a:pPr>
+            <a:endParaRPr lang="en-US" sz="2391" b="1" u="none" strike="noStrike" dirty="0">
+              <a:solidFill>
+                <a:srgbClr val="000000"/>
+              </a:solidFill>
+              <a:latin typeface="Arial MT Pro Bold"/>
+              <a:ea typeface="Arial MT Pro Bold"/>
+              <a:cs typeface="Arial MT Pro Bold"/>
+              <a:sym typeface="Arial MT Pro Bold"/>
+            </a:endParaRPr>
+          </a:p>
+          <a:p>
+            <a:pPr marL="0" lvl="0" indent="0" algn="ctr">
+              <a:lnSpc>
+                <a:spcPts val="3347"/>
+              </a:lnSpc>
+              <a:spcBef>
+                <a:spcPct val="0"/>
+              </a:spcBef>
+            </a:pPr>
+            <a:endParaRPr lang="en-US" sz="2391" b="1" u="none" strike="noStrike" dirty="0">
+              <a:solidFill>
+                <a:srgbClr val="000000"/>
+              </a:solidFill>
+              <a:latin typeface="Arial MT Pro Bold"/>
+              <a:ea typeface="Arial MT Pro Bold"/>
+              <a:cs typeface="Arial MT Pro Bold"/>
+              <a:sym typeface="Arial MT Pro Bold"/>
+            </a:endParaRPr>
+          </a:p>
+          <a:p>
+            <a:pPr marL="0" lvl="0" indent="0" algn="ctr">
+              <a:lnSpc>
+                <a:spcPts val="3347"/>
+              </a:lnSpc>
+              <a:spcBef>
+                <a:spcPct val="0"/>
+              </a:spcBef>
+            </a:pPr>
+            <a:endParaRPr lang="en-US" sz="2391" b="1" u="none" strike="noStrike" dirty="0">
+              <a:solidFill>
+                <a:srgbClr val="000000"/>
+              </a:solidFill>
+              <a:latin typeface="Arial MT Pro Bold"/>
+              <a:ea typeface="Arial MT Pro Bold"/>
+              <a:cs typeface="Arial MT Pro Bold"/>
+              <a:sym typeface="Arial MT Pro Bold"/>
+            </a:endParaRPr>
+          </a:p>
+          <a:p>
+            <a:pPr marL="0" lvl="0" indent="0" algn="ctr">
+              <a:lnSpc>
+                <a:spcPts val="3347"/>
+              </a:lnSpc>
+              <a:spcBef>
+                <a:spcPct val="0"/>
+              </a:spcBef>
+            </a:pPr>
+            <a:endParaRPr lang="en-US" sz="2391" b="1" u="none" strike="noStrike" dirty="0">
+              <a:solidFill>
+                <a:srgbClr val="000000"/>
+              </a:solidFill>
+              <a:latin typeface="Arial MT Pro Bold"/>
+              <a:ea typeface="Arial MT Pro Bold"/>
+              <a:cs typeface="Arial MT Pro Bold"/>
+              <a:sym typeface="Arial MT Pro Bold"/>
+            </a:endParaRPr>
+          </a:p>
+          <a:p>
+            <a:pPr marL="0" lvl="0" indent="0" algn="ctr">
+              <a:lnSpc>
+                <a:spcPts val="3347"/>
+              </a:lnSpc>
+              <a:spcBef>
+                <a:spcPct val="0"/>
+              </a:spcBef>
+            </a:pPr>
+            <a:endParaRPr lang="en-US" sz="2391" b="1" u="none" strike="noStrike" dirty="0">
+              <a:solidFill>
+                <a:srgbClr val="000000"/>
+              </a:solidFill>
+              <a:latin typeface="Arial MT Pro Bold"/>
+              <a:ea typeface="Arial MT Pro Bold"/>
+              <a:cs typeface="Arial MT Pro Bold"/>
+              <a:sym typeface="Arial MT Pro Bold"/>
+            </a:endParaRPr>
+          </a:p>
+          <a:p>
+            <a:pPr marL="0" lvl="0" indent="0" algn="ctr">
+              <a:lnSpc>
+                <a:spcPts val="3347"/>
+              </a:lnSpc>
+              <a:spcBef>
+                <a:spcPct val="0"/>
+              </a:spcBef>
+            </a:pPr>
+            <a:endParaRPr lang="en-US" sz="2391" b="1" u="none" strike="noStrike" dirty="0">
+              <a:solidFill>
+                <a:srgbClr val="000000"/>
+              </a:solidFill>
+              <a:latin typeface="Arial MT Pro Bold"/>
+              <a:ea typeface="Arial MT Pro Bold"/>
+              <a:cs typeface="Arial MT Pro Bold"/>
+              <a:sym typeface="Arial MT Pro Bold"/>
+            </a:endParaRPr>
+          </a:p>
+          <a:p>
+            <a:pPr marL="0" lvl="0" indent="0" algn="ctr">
+              <a:lnSpc>
+                <a:spcPts val="3347"/>
+              </a:lnSpc>
+              <a:spcBef>
+                <a:spcPct val="0"/>
+              </a:spcBef>
+            </a:pPr>
+            <a:endParaRPr lang="en-US" sz="2391" b="1" u="none" strike="noStrike" dirty="0">
+              <a:solidFill>
+                <a:srgbClr val="000000"/>
+              </a:solidFill>
+              <a:latin typeface="Arial MT Pro Bold"/>
+              <a:ea typeface="Arial MT Pro Bold"/>
+              <a:cs typeface="Arial MT Pro Bold"/>
+              <a:sym typeface="Arial MT Pro Bold"/>
+            </a:endParaRPr>
+          </a:p>
+          <a:p>
+            <a:pPr marL="0" lvl="0" indent="0" algn="ctr">
+              <a:lnSpc>
+                <a:spcPts val="3347"/>
+              </a:lnSpc>
+              <a:spcBef>
+                <a:spcPct val="0"/>
+              </a:spcBef>
+            </a:pPr>
+            <a:endParaRPr lang="en-US" sz="2391" b="1" u="none" strike="noStrike" dirty="0">
+              <a:solidFill>
+                <a:srgbClr val="000000"/>
+              </a:solidFill>
+              <a:latin typeface="Arial MT Pro Bold"/>
+              <a:ea typeface="Arial MT Pro Bold"/>
+              <a:cs typeface="Arial MT Pro Bold"/>
+              <a:sym typeface="Arial MT Pro Bold"/>
+            </a:endParaRPr>
+          </a:p>
+        </p:txBody>
+      </p:sp>
+      <p:sp>
+        <p:nvSpPr>
+          <p:cNvPr id="21" name="TextBox 21"/>
+          <p:cNvSpPr txBox="1"/>
+          <p:nvPr/>
+        </p:nvSpPr>
+        <p:spPr>
+          <a:xfrm>
+            <a:off x="1085817" y="1357995"/>
+            <a:ext cx="3041855" cy="2549115"/>
+          </a:xfrm>
+          <a:prstGeom prst="rect">
+            <a:avLst/>
+          </a:prstGeom>
+        </p:spPr>
+        <p:txBody>
+          <a:bodyPr lIns="0" tIns="0" rIns="0" bIns="0" rtlCol="0" anchor="t">
+            <a:spAutoFit/>
+          </a:bodyPr>
+          <a:lstStyle/>
+          <a:p>
+            <a:pPr algn="ctr">
+              <a:lnSpc>
+                <a:spcPts val="3347"/>
+              </a:lnSpc>
+              <a:spcBef>
+                <a:spcPct val="0"/>
+              </a:spcBef>
+            </a:pPr>
+            <a:r>
+              <a:rPr lang="en-US" sz="2391" b="1" dirty="0">
+                <a:solidFill>
+                  <a:srgbClr val="000000"/>
+                </a:solidFill>
+                <a:latin typeface="Arial MT Pro Bold"/>
+                <a:ea typeface="Arial MT Pro Bold"/>
+                <a:cs typeface="Arial MT Pro Bold"/>
+                <a:sym typeface="Arial MT Pro Bold"/>
+              </a:rPr>
+              <a:t>{{PHOTO}}</a:t>
+            </a:r>
+          </a:p>
+          <a:p>
+            <a:pPr algn="ctr">
+              <a:lnSpc>
+                <a:spcPts val="3347"/>
+              </a:lnSpc>
+              <a:spcBef>
+                <a:spcPct val="0"/>
+              </a:spcBef>
+            </a:pPr>
+            <a:endParaRPr lang="en-US" sz="2391" b="1" dirty="0">
+              <a:solidFill>
+                <a:srgbClr val="000000"/>
+              </a:solidFill>
+              <a:latin typeface="Arial MT Pro Bold"/>
+              <a:ea typeface="Arial MT Pro Bold"/>
+              <a:cs typeface="Arial MT Pro Bold"/>
+              <a:sym typeface="Arial MT Pro Bold"/>
+            </a:endParaRPr>
+          </a:p>
+          <a:p>
+            <a:pPr algn="ctr">
+              <a:lnSpc>
+                <a:spcPts val="3347"/>
+              </a:lnSpc>
+              <a:spcBef>
+                <a:spcPct val="0"/>
+              </a:spcBef>
+            </a:pPr>
+            <a:endParaRPr lang="en-US" sz="2391" b="1" dirty="0">
+              <a:solidFill>
+                <a:srgbClr val="000000"/>
+              </a:solidFill>
+              <a:latin typeface="Arial MT Pro Bold"/>
+              <a:ea typeface="Arial MT Pro Bold"/>
+              <a:cs typeface="Arial MT Pro Bold"/>
+              <a:sym typeface="Arial MT Pro Bold"/>
+            </a:endParaRPr>
+          </a:p>
+          <a:p>
+            <a:pPr algn="ctr">
+              <a:lnSpc>
+                <a:spcPts val="3347"/>
+              </a:lnSpc>
+              <a:spcBef>
+                <a:spcPct val="0"/>
+              </a:spcBef>
+            </a:pPr>
+            <a:endParaRPr lang="en-US" sz="2391" b="1" dirty="0">
+              <a:solidFill>
+                <a:srgbClr val="000000"/>
+              </a:solidFill>
+              <a:latin typeface="Arial MT Pro Bold"/>
+              <a:ea typeface="Arial MT Pro Bold"/>
+              <a:cs typeface="Arial MT Pro Bold"/>
+              <a:sym typeface="Arial MT Pro Bold"/>
+            </a:endParaRPr>
+          </a:p>
+          <a:p>
+            <a:pPr algn="ctr">
+              <a:lnSpc>
+                <a:spcPts val="3347"/>
+              </a:lnSpc>
+              <a:spcBef>
+                <a:spcPct val="0"/>
+              </a:spcBef>
+            </a:pPr>
+            <a:endParaRPr lang="en-US" sz="2391" b="1" dirty="0">
+              <a:solidFill>
+                <a:srgbClr val="000000"/>
+              </a:solidFill>
+              <a:latin typeface="Arial MT Pro Bold"/>
+              <a:ea typeface="Arial MT Pro Bold"/>
+              <a:cs typeface="Arial MT Pro Bold"/>
+              <a:sym typeface="Arial MT Pro Bold"/>
+            </a:endParaRPr>
+          </a:p>
+          <a:p>
+            <a:pPr algn="ctr">
+              <a:lnSpc>
+                <a:spcPts val="3347"/>
+              </a:lnSpc>
+              <a:spcBef>
+                <a:spcPct val="0"/>
+              </a:spcBef>
+            </a:pPr>
+            <a:endParaRPr lang="en-US" sz="2391" b="1" dirty="0">
+              <a:solidFill>
+                <a:srgbClr val="000000"/>
               </a:solidFill>
               <a:latin typeface="Arial MT Pro Bold"/>
               <a:ea typeface="Arial MT Pro Bold"/>

--- a/BioPofile_Template.pptx
+++ b/BioPofile_Template.pptx
@@ -316,7 +316,7 @@
             <a:fld id="{1D8BD707-D9CF-40AE-B4C6-C98DA3205C09}" type="datetimeFigureOut">
               <a:rPr lang="en-US" smtClean="0"/>
               <a:pPr/>
-              <a:t>7/27/2026</a:t>
+              <a:t>7/28/2026</a:t>
             </a:fld>
             <a:endParaRPr lang="en-US"/>
           </a:p>
@@ -481,7 +481,7 @@
             <a:fld id="{1D8BD707-D9CF-40AE-B4C6-C98DA3205C09}" type="datetimeFigureOut">
               <a:rPr lang="en-US" smtClean="0"/>
               <a:pPr/>
-              <a:t>7/27/2026</a:t>
+              <a:t>7/28/2026</a:t>
             </a:fld>
             <a:endParaRPr lang="en-US"/>
           </a:p>
@@ -656,7 +656,7 @@
             <a:fld id="{1D8BD707-D9CF-40AE-B4C6-C98DA3205C09}" type="datetimeFigureOut">
               <a:rPr lang="en-US" smtClean="0"/>
               <a:pPr/>
-              <a:t>7/27/2026</a:t>
+              <a:t>7/28/2026</a:t>
             </a:fld>
             <a:endParaRPr lang="en-US"/>
           </a:p>
@@ -821,7 +821,7 @@
             <a:fld id="{1D8BD707-D9CF-40AE-B4C6-C98DA3205C09}" type="datetimeFigureOut">
               <a:rPr lang="en-US" smtClean="0"/>
               <a:pPr/>
-              <a:t>7/27/2026</a:t>
+              <a:t>7/28/2026</a:t>
             </a:fld>
             <a:endParaRPr lang="en-US"/>
           </a:p>
@@ -1063,7 +1063,7 @@
             <a:fld id="{1D8BD707-D9CF-40AE-B4C6-C98DA3205C09}" type="datetimeFigureOut">
               <a:rPr lang="en-US" smtClean="0"/>
               <a:pPr/>
-              <a:t>7/27/2026</a:t>
+              <a:t>7/28/2026</a:t>
             </a:fld>
             <a:endParaRPr lang="en-US"/>
           </a:p>
@@ -1345,7 +1345,7 @@
             <a:fld id="{1D8BD707-D9CF-40AE-B4C6-C98DA3205C09}" type="datetimeFigureOut">
               <a:rPr lang="en-US" smtClean="0"/>
               <a:pPr/>
-              <a:t>7/27/2026</a:t>
+              <a:t>7/28/2026</a:t>
             </a:fld>
             <a:endParaRPr lang="en-US"/>
           </a:p>
@@ -1761,7 +1761,7 @@
             <a:fld id="{1D8BD707-D9CF-40AE-B4C6-C98DA3205C09}" type="datetimeFigureOut">
               <a:rPr lang="en-US" smtClean="0"/>
               <a:pPr/>
-              <a:t>7/27/2026</a:t>
+              <a:t>7/28/2026</a:t>
             </a:fld>
             <a:endParaRPr lang="en-US"/>
           </a:p>
@@ -1875,7 +1875,7 @@
             <a:fld id="{1D8BD707-D9CF-40AE-B4C6-C98DA3205C09}" type="datetimeFigureOut">
               <a:rPr lang="en-US" smtClean="0"/>
               <a:pPr/>
-              <a:t>7/27/2026</a:t>
+              <a:t>7/28/2026</a:t>
             </a:fld>
             <a:endParaRPr lang="en-US"/>
           </a:p>
@@ -1967,7 +1967,7 @@
             <a:fld id="{1D8BD707-D9CF-40AE-B4C6-C98DA3205C09}" type="datetimeFigureOut">
               <a:rPr lang="en-US" smtClean="0"/>
               <a:pPr/>
-              <a:t>7/27/2026</a:t>
+              <a:t>7/28/2026</a:t>
             </a:fld>
             <a:endParaRPr lang="en-US"/>
           </a:p>
@@ -2239,7 +2239,7 @@
             <a:fld id="{1D8BD707-D9CF-40AE-B4C6-C98DA3205C09}" type="datetimeFigureOut">
               <a:rPr lang="en-US" smtClean="0"/>
               <a:pPr/>
-              <a:t>7/27/2026</a:t>
+              <a:t>7/28/2026</a:t>
             </a:fld>
             <a:endParaRPr lang="en-US"/>
           </a:p>
@@ -2488,7 +2488,7 @@
             <a:fld id="{1D8BD707-D9CF-40AE-B4C6-C98DA3205C09}" type="datetimeFigureOut">
               <a:rPr lang="en-US" smtClean="0"/>
               <a:pPr/>
-              <a:t>7/27/2026</a:t>
+              <a:t>7/28/2026</a:t>
             </a:fld>
             <a:endParaRPr lang="en-US"/>
           </a:p>
@@ -2696,7 +2696,7 @@
             <a:fld id="{1D8BD707-D9CF-40AE-B4C6-C98DA3205C09}" type="datetimeFigureOut">
               <a:rPr lang="en-US" smtClean="0"/>
               <a:pPr/>
-              <a:t>7/27/2026</a:t>
+              <a:t>7/28/2026</a:t>
             </a:fld>
             <a:endParaRPr lang="en-US"/>
           </a:p>
@@ -3675,7 +3675,7 @@
               </a:spcBef>
             </a:pPr>
             <a:r>
-              <a:rPr lang="en-US" sz="2400" b="1" u="none" strike="noStrike" dirty="0">
+              <a:rPr lang="en-US" b="1" u="none" strike="noStrike" dirty="0">
                 <a:solidFill>
                   <a:srgbClr val="FFFFFF"/>
                 </a:solidFill>
@@ -3696,7 +3696,7 @@
                 <a:spcPct val="0"/>
               </a:spcBef>
             </a:pPr>
-            <a:endParaRPr lang="en-US" sz="2400" b="1" u="none" strike="noStrike" dirty="0">
+            <a:endParaRPr lang="en-US" b="1" u="none" strike="noStrike" dirty="0">
               <a:solidFill>
                 <a:srgbClr val="FFFFFF"/>
               </a:solidFill>
@@ -3715,7 +3715,7 @@
                 <a:spcPct val="0"/>
               </a:spcBef>
             </a:pPr>
-            <a:endParaRPr lang="en-US" sz="2400" b="1" u="none" strike="noStrike" dirty="0">
+            <a:endParaRPr lang="en-US" b="1" u="none" strike="noStrike" dirty="0">
               <a:solidFill>
                 <a:srgbClr val="FFFFFF"/>
               </a:solidFill>
@@ -3734,7 +3734,7 @@
                 <a:spcPct val="0"/>
               </a:spcBef>
             </a:pPr>
-            <a:endParaRPr lang="en-US" sz="2400" b="1" u="none" strike="noStrike" dirty="0">
+            <a:endParaRPr lang="en-US" b="1" u="none" strike="noStrike" dirty="0">
               <a:solidFill>
                 <a:srgbClr val="FFFFFF"/>
               </a:solidFill>
@@ -3753,7 +3753,7 @@
                 <a:spcPct val="0"/>
               </a:spcBef>
             </a:pPr>
-            <a:endParaRPr lang="en-US" sz="2400" b="1" u="none" strike="noStrike" dirty="0">
+            <a:endParaRPr lang="en-US" b="1" u="none" strike="noStrike" dirty="0">
               <a:solidFill>
                 <a:srgbClr val="FFFFFF"/>
               </a:solidFill>
